--- a/sample/graph1.pptx
+++ b/sample/graph1.pptx
@@ -120,7 +120,7 @@
               </a:lnSpc>
             </a:pPr>
             <a:r>
-              <a:rPr lang="ja-JP" altLang="en-US" sz="1450">
+              <a:rPr lang="ja-JP" altLang="en-US" sz="1400">
                 <a:solidFill>
                   <a:srgbClr val="333333"/>
                 </a:solidFill>
@@ -186,7 +186,7 @@
               </a:lnSpc>
             </a:pPr>
             <a:r>
-              <a:rPr lang="ja-JP" altLang="en-US" sz="1450">
+              <a:rPr lang="ja-JP" altLang="en-US" sz="1400">
                 <a:solidFill>
                   <a:srgbClr val="333333"/>
                 </a:solidFill>
@@ -231,7 +231,7 @@
               </a:lnSpc>
             </a:pPr>
             <a:r>
-              <a:rPr lang="ja-JP" altLang="en-US" sz="1450">
+              <a:rPr lang="ja-JP" altLang="en-US" sz="1400">
                 <a:solidFill>
                   <a:srgbClr val="5A4500"/>
                 </a:solidFill>
@@ -315,7 +315,7 @@
               </a:lnSpc>
             </a:pPr>
             <a:r>
-              <a:rPr lang="ja-JP" altLang="en-US" sz="1450">
+              <a:rPr lang="ja-JP" altLang="en-US" sz="1400">
                 <a:solidFill>
                   <a:srgbClr val="1A4314"/>
                 </a:solidFill>
@@ -360,7 +360,7 @@
               </a:lnSpc>
             </a:pPr>
             <a:r>
-              <a:rPr lang="ja-JP" altLang="en-US" sz="1450">
+              <a:rPr lang="ja-JP" altLang="en-US" sz="1400">
                 <a:solidFill>
                   <a:srgbClr val="7A1A1A"/>
                 </a:solidFill>
@@ -407,7 +407,7 @@
               </a:lnSpc>
             </a:pPr>
             <a:r>
-              <a:rPr lang="ja-JP" altLang="en-US" sz="1450">
+              <a:rPr lang="ja-JP" altLang="en-US" sz="1400">
                 <a:solidFill>
                   <a:srgbClr val="1A4314"/>
                 </a:solidFill>
@@ -452,7 +452,7 @@
               </a:lnSpc>
             </a:pPr>
             <a:r>
-              <a:rPr lang="ja-JP" altLang="en-US" sz="1450">
+              <a:rPr lang="ja-JP" altLang="en-US" sz="1400">
                 <a:solidFill>
                   <a:srgbClr val="333333"/>
                 </a:solidFill>
@@ -469,7 +469,7 @@
               </a:lnSpc>
             </a:pPr>
             <a:r>
-              <a:rPr lang="ja-JP" altLang="en-US" sz="1450">
+              <a:rPr lang="ja-JP" altLang="en-US" sz="1400">
                 <a:solidFill>
                   <a:srgbClr val="333333"/>
                 </a:solidFill>
@@ -516,7 +516,7 @@
               </a:lnSpc>
             </a:pPr>
             <a:r>
-              <a:rPr lang="ja-JP" altLang="en-US" sz="1450">
+              <a:rPr lang="ja-JP" altLang="en-US" sz="1400">
                 <a:solidFill>
                   <a:srgbClr val="1A4314"/>
                 </a:solidFill>
@@ -760,8 +760,8 @@
         </p:nvSpPr>
         <p:spPr>
           <a:xfrm>
-            <a:off x="5783040" y="2670456"/>
-            <a:ext cx="317838" cy="317838"/>
+            <a:off x="5753903" y="2670456"/>
+            <a:ext cx="376111" cy="317838"/>
           </a:xfrm>
           <a:prstGeom prst="roundRect">
             <a:avLst/>
@@ -776,7 +776,7 @@
           </a:ln>
         </p:spPr>
         <p:txBody>
-          <a:bodyPr rtlCol="0" anchor="ctr" lIns="18288" tIns="9144" rIns="18288" bIns="9144"/>
+          <a:bodyPr rtlCol="0" anchor="ctr" wrap="none" lIns="0" tIns="0" rIns="0" bIns="0"/>
           <a:lstStyle/>
           <a:p>
             <a:pPr algn="ctr">
@@ -785,7 +785,7 @@
               </a:lnSpc>
             </a:pPr>
             <a:r>
-              <a:rPr lang="ja-JP" altLang="en-US" sz="1450">
+              <a:rPr lang="ja-JP" altLang="en-US" sz="1400">
                 <a:solidFill>
                   <a:srgbClr val="333333"/>
                 </a:solidFill>
@@ -805,8 +805,8 @@
         </p:nvSpPr>
         <p:spPr>
           <a:xfrm>
-            <a:off x="5826903" y="3522141"/>
-            <a:ext cx="329544" cy="317838"/>
+            <a:off x="5797064" y="3522141"/>
+            <a:ext cx="389222" cy="317838"/>
           </a:xfrm>
           <a:prstGeom prst="roundRect">
             <a:avLst/>
@@ -821,7 +821,7 @@
           </a:ln>
         </p:spPr>
         <p:txBody>
-          <a:bodyPr rtlCol="0" anchor="ctr" lIns="18288" tIns="9144" rIns="18288" bIns="9144"/>
+          <a:bodyPr rtlCol="0" anchor="ctr" wrap="none" lIns="0" tIns="0" rIns="0" bIns="0"/>
           <a:lstStyle/>
           <a:p>
             <a:pPr algn="ctr">
@@ -830,7 +830,7 @@
               </a:lnSpc>
             </a:pPr>
             <a:r>
-              <a:rPr lang="ja-JP" altLang="en-US" sz="1450">
+              <a:rPr lang="ja-JP" altLang="en-US" sz="1400">
                 <a:solidFill>
                   <a:srgbClr val="333333"/>
                 </a:solidFill>

--- a/sample/graph1.pptx
+++ b/sample/graph1.pptx
@@ -760,8 +760,8 @@
         </p:nvSpPr>
         <p:spPr>
           <a:xfrm>
-            <a:off x="5753903" y="2670456"/>
-            <a:ext cx="376111" cy="317838"/>
+            <a:off x="5752224" y="2653262"/>
+            <a:ext cx="379468" cy="352225"/>
           </a:xfrm>
           <a:prstGeom prst="roundRect">
             <a:avLst/>
@@ -805,8 +805,8 @@
         </p:nvSpPr>
         <p:spPr>
           <a:xfrm>
-            <a:off x="5797064" y="3522141"/>
-            <a:ext cx="389222" cy="317838"/>
+            <a:off x="5795386" y="3504947"/>
+            <a:ext cx="392579" cy="352225"/>
           </a:xfrm>
           <a:prstGeom prst="roundRect">
             <a:avLst/>

--- a/sample/graph1.pptx
+++ b/sample/graph1.pptx
@@ -111,7 +111,7 @@
           </a:ln>
         </p:spPr>
         <p:txBody>
-          <a:bodyPr rtlCol="0" anchor="ctr" lIns="18288" tIns="9144" rIns="18288" bIns="9144"/>
+          <a:bodyPr rtlCol="0" anchor="ctr" wrap="none" lIns="18288" tIns="9144" rIns="18288" bIns="9144"/>
           <a:lstStyle/>
           <a:p>
             <a:pPr algn="ctr">
@@ -177,7 +177,7 @@
           </a:ln>
         </p:spPr>
         <p:txBody>
-          <a:bodyPr rtlCol="0" anchor="ctr" lIns="18288" tIns="9144" rIns="18288" bIns="9144"/>
+          <a:bodyPr rtlCol="0" anchor="ctr" wrap="none" lIns="18288" tIns="9144" rIns="18288" bIns="9144"/>
           <a:lstStyle/>
           <a:p>
             <a:pPr algn="ctr">
@@ -222,7 +222,7 @@
           </a:ln>
         </p:spPr>
         <p:txBody>
-          <a:bodyPr rtlCol="0" anchor="ctr" lIns="18288" tIns="9144" rIns="18288" bIns="9144"/>
+          <a:bodyPr rtlCol="0" anchor="ctr" wrap="none" lIns="18288" tIns="9144" rIns="18288" bIns="9144"/>
           <a:lstStyle/>
           <a:p>
             <a:pPr algn="ctr">
@@ -306,7 +306,7 @@
           </a:ln>
         </p:spPr>
         <p:txBody>
-          <a:bodyPr rtlCol="0" anchor="ctr" lIns="18288" tIns="9144" rIns="18288" bIns="9144"/>
+          <a:bodyPr rtlCol="0" anchor="ctr" wrap="none" lIns="18288" tIns="9144" rIns="18288" bIns="9144"/>
           <a:lstStyle/>
           <a:p>
             <a:pPr algn="ctr">
@@ -351,7 +351,7 @@
           </a:ln>
         </p:spPr>
         <p:txBody>
-          <a:bodyPr rtlCol="0" anchor="ctr" lIns="18288" tIns="9144" rIns="18288" bIns="9144"/>
+          <a:bodyPr rtlCol="0" anchor="ctr" wrap="none" lIns="18288" tIns="9144" rIns="18288" bIns="9144"/>
           <a:lstStyle/>
           <a:p>
             <a:pPr algn="ctr">
@@ -398,7 +398,7 @@
           </a:ln>
         </p:spPr>
         <p:txBody>
-          <a:bodyPr rtlCol="0" anchor="ctr" lIns="18288" tIns="9144" rIns="18288" bIns="9144"/>
+          <a:bodyPr rtlCol="0" anchor="ctr" wrap="none" lIns="18288" tIns="9144" rIns="18288" bIns="9144"/>
           <a:lstStyle/>
           <a:p>
             <a:pPr algn="ctr">
@@ -443,7 +443,7 @@
           </a:ln>
         </p:spPr>
         <p:txBody>
-          <a:bodyPr rtlCol="0" anchor="ctr" lIns="18288" tIns="9144" rIns="18288" bIns="9144"/>
+          <a:bodyPr rtlCol="0" anchor="ctr" wrap="none" lIns="18288" tIns="9144" rIns="18288" bIns="9144"/>
           <a:lstStyle/>
           <a:p>
             <a:pPr algn="ctr">
@@ -507,7 +507,7 @@
           </a:ln>
         </p:spPr>
         <p:txBody>
-          <a:bodyPr rtlCol="0" anchor="ctr" lIns="18288" tIns="9144" rIns="18288" bIns="9144"/>
+          <a:bodyPr rtlCol="0" anchor="ctr" wrap="none" lIns="18288" tIns="9144" rIns="18288" bIns="9144"/>
           <a:lstStyle/>
           <a:p>
             <a:pPr algn="ctr">
